--- a/交付物/演示文稿/M0_演示文稿_CFG-5_第0课_先导课_点亮之前_v4.pptx
+++ b/交付物/演示文稿/M0_演示文稿_CFG-5_第0课_先导课_点亮之前_v4.pptx
@@ -1105,7 +1105,7 @@
                 <a:latin typeface="Noto Sans SC"/>
                 <a:ea typeface="Noto Sans SC"/>
               </a:rPr>
-              <a:t>柴火创客学院 M0 · 零基础智能硬件入门 · 先导课</a:t>
+              <a:t>柴火创客学园 M0 · 零基础智能硬件入门 · 先导课</a:t>
             </a:r>
             <a:endParaRPr lang="en-US" sz="1500"/>
           </a:p>
@@ -1363,7 +1363,7 @@
                 <a:latin typeface="Noto Sans SC"/>
                 <a:ea typeface="Noto Sans SC"/>
               </a:rPr>
-              <a:t>柴火创客学院 M0 · 先导课 ｜ 2026</a:t>
+              <a:t>柴火创客学园 M0 · 先导课 ｜ 2026</a:t>
             </a:r>
             <a:endParaRPr lang="en-US" sz="1100"/>
           </a:p>
@@ -2855,7 +2855,7 @@
                 <a:latin typeface="Noto Sans SC"/>
                 <a:ea typeface="Noto Sans SC"/>
               </a:rPr>
-              <a:t>柴火创客学院 M0 · 先导课 · 点亮之前</a:t>
+              <a:t>柴火创客学园 M0 · 先导课 · 点亮之前</a:t>
             </a:r>
             <a:endParaRPr lang="en-US" sz="1100"/>
           </a:p>
@@ -3368,7 +3368,7 @@
                 <a:latin typeface="Noto Sans SC"/>
                 <a:ea typeface="Noto Sans SC"/>
               </a:rPr>
-              <a:t>柴火创客学院 M0 · 先导课 · 点亮之前</a:t>
+              <a:t>柴火创客学园 M0 · 先导课 · 点亮之前</a:t>
             </a:r>
             <a:endParaRPr lang="en-US" sz="1100"/>
           </a:p>
@@ -3784,7 +3784,7 @@
                 <a:latin typeface="Noto Sans SC"/>
                 <a:ea typeface="Noto Sans SC"/>
               </a:rPr>
-              <a:t>柴火创客学院 M0 · 先导课 · 点亮之前</a:t>
+              <a:t>柴火创客学园 M0 · 先导课 · 点亮之前</a:t>
             </a:r>
             <a:endParaRPr lang="en-US" sz="1100"/>
           </a:p>
@@ -4409,7 +4409,7 @@
                 <a:latin typeface="Noto Sans SC"/>
                 <a:ea typeface="Noto Sans SC"/>
               </a:rPr>
-              <a:t>柴火创客学院 M0 · 先导课 · 点亮之前</a:t>
+              <a:t>柴火创客学园 M0 · 先导课 · 点亮之前</a:t>
             </a:r>
             <a:endParaRPr lang="en-US" sz="1100"/>
           </a:p>
@@ -4811,7 +4811,7 @@
                 <a:latin typeface="Noto Sans SC"/>
                 <a:ea typeface="Noto Sans SC"/>
               </a:rPr>
-              <a:t>柴火创客学院 M0 · 先导课 · 点亮之前</a:t>
+              <a:t>柴火创客学园 M0 · 先导课 · 点亮之前</a:t>
             </a:r>
             <a:endParaRPr lang="en-US" sz="1100"/>
           </a:p>
@@ -5357,7 +5357,7 @@
                 <a:latin typeface="Noto Sans SC"/>
                 <a:ea typeface="Noto Sans SC"/>
               </a:rPr>
-              <a:t>柴火创客学院 M0 · 先导课 · 点亮之前</a:t>
+              <a:t>柴火创客学园 M0 · 先导课 · 点亮之前</a:t>
             </a:r>
             <a:endParaRPr lang="en-US" sz="1100"/>
           </a:p>
@@ -6829,7 +6829,7 @@
                 <a:latin typeface="Noto Sans SC"/>
                 <a:ea typeface="Noto Sans SC"/>
               </a:rPr>
-              <a:t>柴火创客学院 M0 · 先导课 · 点亮之前</a:t>
+              <a:t>柴火创客学园 M0 · 先导课 · 点亮之前</a:t>
             </a:r>
             <a:endParaRPr lang="en-US" sz="1100"/>
           </a:p>
@@ -7834,7 +7834,7 @@
                 <a:latin typeface="Noto Sans SC"/>
                 <a:ea typeface="Noto Sans SC"/>
               </a:rPr>
-              <a:t>柴火创客学院 M0 · 先导课 · 点亮之前</a:t>
+              <a:t>柴火创客学园 M0 · 先导课 · 点亮之前</a:t>
             </a:r>
             <a:endParaRPr lang="en-US" sz="1100"/>
           </a:p>
@@ -8695,7 +8695,7 @@
                 <a:latin typeface="Noto Sans SC"/>
                 <a:ea typeface="Noto Sans SC"/>
               </a:rPr>
-              <a:t>柴火创客学院 M0 · 先导课 · 点亮之前</a:t>
+              <a:t>柴火创客学园 M0 · 先导课 · 点亮之前</a:t>
             </a:r>
             <a:endParaRPr lang="en-US" sz="1100"/>
           </a:p>
@@ -10576,7 +10576,7 @@
                 <a:latin typeface="Noto Sans SC"/>
                 <a:ea typeface="Noto Sans SC"/>
               </a:rPr>
-              <a:t>柴火创客学院 M0 · 先导课 · 点亮之前</a:t>
+              <a:t>柴火创客学园 M0 · 先导课 · 点亮之前</a:t>
             </a:r>
             <a:endParaRPr lang="en-US" sz="1100"/>
           </a:p>
@@ -12845,7 +12845,7 @@
                 <a:latin typeface="Noto Sans SC"/>
                 <a:ea typeface="Noto Sans SC"/>
               </a:rPr>
-              <a:t>柴火创客学院 M0 · 先导课 · 点亮之前</a:t>
+              <a:t>柴火创客学园 M0 · 先导课 · 点亮之前</a:t>
             </a:r>
             <a:endParaRPr lang="en-US" sz="1100"/>
           </a:p>
@@ -13781,7 +13781,7 @@
                 <a:latin typeface="Noto Sans SC"/>
                 <a:ea typeface="Noto Sans SC"/>
               </a:rPr>
-              <a:t>柴火创客学院 M0 · 先导课 · 点亮之前</a:t>
+              <a:t>柴火创客学园 M0 · 先导课 · 点亮之前</a:t>
             </a:r>
             <a:endParaRPr lang="en-US" sz="1100"/>
           </a:p>
